--- a/index/designs/y7-l11/l8-cumulative-review/l8-cumulative-review.pptx
+++ b/index/designs/y7-l11/l8-cumulative-review/l8-cumulative-review.pptx
@@ -2273,12 +2273,6 @@
               </a:rPr>
               <a:t>总</a:t>
             </a:r>
-            <a:pPr algn="ctr" indent="0" marL="0">
-              <a:spcBef>
-                <a:spcPts val="800"/>
-              </a:spcBef>
-              <a:buNone/>
-            </a:pPr>
             <a:r>
               <a:rPr lang="en-US" sz="5200" b="1" dirty="0">
                 <a:solidFill>
@@ -5024,12 +5018,6 @@
               </a:rPr>
               <a:t>Every answer follows the same pattern: </a:t>
             </a:r>
-            <a:pPr algn="l" indent="0" marL="0">
-              <a:spcBef>
-                <a:spcPts val="400"/>
-              </a:spcBef>
-              <a:buNone/>
-            </a:pPr>
             <a:r>
               <a:rPr lang="en-US" sz="1100" b="1" dirty="0">
                 <a:solidFill>
@@ -5041,12 +5029,6 @@
               </a:rPr>
               <a:t>subject + time-of-day + clock time + verb</a:t>
             </a:r>
-            <a:pPr algn="l" indent="0" marL="0">
-              <a:spcBef>
-                <a:spcPts val="400"/>
-              </a:spcBef>
-              <a:buNone/>
-            </a:pPr>
             <a:r>
               <a:rPr lang="en-US" sz="1100" dirty="0">
                 <a:solidFill>
@@ -5487,9 +5469,6 @@
               </a:rPr>
               <a:t>1 </a:t>
             </a:r>
-            <a:pPr algn="ctr" indent="0" marL="0">
-              <a:buNone/>
-            </a:pPr>
             <a:r>
               <a:rPr lang="en-US" sz="1200" b="1" dirty="0">
                 <a:solidFill>
@@ -5572,9 +5551,6 @@
               </a:rPr>
               <a:t>1 </a:t>
             </a:r>
-            <a:pPr algn="ctr" indent="0" marL="0">
-              <a:buNone/>
-            </a:pPr>
             <a:r>
               <a:rPr lang="en-US" sz="1200" b="1" dirty="0">
                 <a:solidFill>
@@ -5657,9 +5633,6 @@
               </a:rPr>
               <a:t>1 </a:t>
             </a:r>
-            <a:pPr algn="ctr" indent="0" marL="0">
-              <a:buNone/>
-            </a:pPr>
             <a:r>
               <a:rPr lang="en-US" sz="1200" b="1" dirty="0">
                 <a:solidFill>
@@ -7190,9 +7163,6 @@
               </a:rPr>
               <a:t>No repeating words.</a:t>
             </a:r>
-            <a:pPr algn="l" indent="0" marL="0">
-              <a:buNone/>
-            </a:pPr>
             <a:r>
               <a:rPr lang="en-US" sz="950" dirty="0">
                 <a:solidFill>
@@ -7314,9 +7284,6 @@
               </a:rPr>
               <a:t>5 seconds per person.</a:t>
             </a:r>
-            <a:pPr algn="l" indent="0" marL="0">
-              <a:buNone/>
-            </a:pPr>
             <a:r>
               <a:rPr lang="en-US" sz="950" dirty="0">
                 <a:solidFill>
@@ -7438,9 +7405,6 @@
               </a:rPr>
               <a:t>New category each round.</a:t>
             </a:r>
-            <a:pPr algn="l" indent="0" marL="0">
-              <a:buNone/>
-            </a:pPr>
             <a:r>
               <a:rPr lang="en-US" sz="950" dirty="0">
                 <a:solidFill>
@@ -7562,9 +7526,6 @@
               </a:rPr>
               <a:t>Verbal game only.</a:t>
             </a:r>
-            <a:pPr algn="l" indent="0" marL="0">
-              <a:buNone/>
-            </a:pPr>
             <a:r>
               <a:rPr lang="en-US" sz="950" dirty="0">
                 <a:solidFill>
@@ -8302,15 +8263,6 @@
               </a:rPr>
               <a:t>On paper, write: </a:t>
             </a:r>
-            <a:pPr algn="l" indent="0" marL="0">
-              <a:lnSpc>
-                <a:spcPts val="1725"/>
-              </a:lnSpc>
-              <a:spcBef>
-                <a:spcPts val="600"/>
-              </a:spcBef>
-              <a:buNone/>
-            </a:pPr>
             <a:r>
               <a:rPr lang="en-US" sz="1150" b="1" dirty="0">
                 <a:solidFill>
@@ -8322,15 +8274,6 @@
               </a:rPr>
               <a:t>your strongest area</a:t>
             </a:r>
-            <a:pPr algn="l" indent="0" marL="0">
-              <a:lnSpc>
-                <a:spcPts val="1725"/>
-              </a:lnSpc>
-              <a:spcBef>
-                <a:spcPts val="600"/>
-              </a:spcBef>
-              <a:buNone/>
-            </a:pPr>
             <a:r>
               <a:rPr lang="en-US" sz="1150" dirty="0">
                 <a:solidFill>
@@ -8342,15 +8285,6 @@
               </a:rPr>
               <a:t> from this unit, and </a:t>
             </a:r>
-            <a:pPr algn="l" indent="0" marL="0">
-              <a:lnSpc>
-                <a:spcPts val="1725"/>
-              </a:lnSpc>
-              <a:spcBef>
-                <a:spcPts val="600"/>
-              </a:spcBef>
-              <a:buNone/>
-            </a:pPr>
             <a:r>
               <a:rPr lang="en-US" sz="1150" b="1" dirty="0">
                 <a:solidFill>
@@ -8362,15 +8296,6 @@
               </a:rPr>
               <a:t>one thing you'll review</a:t>
             </a:r>
-            <a:pPr algn="l" indent="0" marL="0">
-              <a:lnSpc>
-                <a:spcPts val="1725"/>
-              </a:lnSpc>
-              <a:spcBef>
-                <a:spcPts val="600"/>
-              </a:spcBef>
-              <a:buNone/>
-            </a:pPr>
             <a:r>
               <a:rPr lang="en-US" sz="1150" dirty="0">
                 <a:solidFill>
@@ -8858,15 +8783,6 @@
               </a:rPr>
               <a:t>You built one full cumulative dialogue and practised translating the whole unit's routine language — </a:t>
             </a:r>
-            <a:pPr algn="ctr" indent="0" marL="0">
-              <a:lnSpc>
-                <a:spcPts val="1950"/>
-              </a:lnSpc>
-              <a:spcBef>
-                <a:spcPts val="800"/>
-              </a:spcBef>
-              <a:buNone/>
-            </a:pPr>
             <a:r>
               <a:rPr lang="en-US" sz="1300" b="1" dirty="0">
                 <a:solidFill>
@@ -9082,15 +8998,6 @@
               </a:rPr>
               <a:t>Today: </a:t>
             </a:r>
-            <a:pPr algn="ctr" indent="0" marL="0">
-              <a:lnSpc>
-                <a:spcPts val="1650"/>
-              </a:lnSpc>
-              <a:spcBef>
-                <a:spcPts val="1600"/>
-              </a:spcBef>
-              <a:buNone/>
-            </a:pPr>
             <a:r>
               <a:rPr lang="en-US" sz="1100" b="1" dirty="0">
                 <a:solidFill>
@@ -9102,15 +9009,6 @@
               </a:rPr>
               <a:t>cumulative dialogue + Test 4.2 translation practice</a:t>
             </a:r>
-            <a:pPr algn="ctr" indent="0" marL="0">
-              <a:lnSpc>
-                <a:spcPts val="1650"/>
-              </a:lnSpc>
-              <a:spcBef>
-                <a:spcPts val="1600"/>
-              </a:spcBef>
-              <a:buNone/>
-            </a:pPr>
             <a:r>
               <a:rPr lang="en-US" sz="1100" dirty="0">
                 <a:solidFill>
@@ -10596,12 +10494,6 @@
               </a:rPr>
               <a:t>We are learning to combine everything from this unit — </a:t>
             </a:r>
-            <a:pPr algn="l" indent="0" marL="0">
-              <a:spcBef>
-                <a:spcPts val="400"/>
-              </a:spcBef>
-              <a:buNone/>
-            </a:pPr>
             <a:r>
               <a:rPr lang="en-US" sz="1400" b="1" dirty="0">
                 <a:solidFill>
@@ -10613,12 +10505,6 @@
               </a:rPr>
               <a:t>time, time-of-day, routine, and activities</a:t>
             </a:r>
-            <a:pPr algn="l" indent="0" marL="0">
-              <a:spcBef>
-                <a:spcPts val="400"/>
-              </a:spcBef>
-              <a:buNone/>
-            </a:pPr>
             <a:r>
               <a:rPr lang="en-US" sz="1400" dirty="0">
                 <a:solidFill>
@@ -10740,9 +10626,6 @@
               </a:rPr>
               <a:t>I can write a full dialogue covering </a:t>
             </a:r>
-            <a:pPr algn="l" indent="0" marL="0">
-              <a:buNone/>
-            </a:pPr>
             <a:r>
               <a:rPr lang="en-US" sz="1300" b="1" dirty="0">
                 <a:solidFill>
@@ -10754,9 +10637,6 @@
               </a:rPr>
               <a:t>time, routine, and activities</a:t>
             </a:r>
-            <a:pPr algn="l" indent="0" marL="0">
-              <a:buNone/>
-            </a:pPr>
             <a:r>
               <a:rPr lang="en-US" sz="1300" dirty="0">
                 <a:solidFill>
@@ -10917,9 +10797,6 @@
               </a:rPr>
               <a:t>I can </a:t>
             </a:r>
-            <a:pPr algn="l" indent="0" marL="0">
-              <a:buNone/>
-            </a:pPr>
             <a:r>
               <a:rPr lang="en-US" sz="1300" b="1" dirty="0">
                 <a:solidFill>
@@ -10931,9 +10808,6 @@
               </a:rPr>
               <a:t>translate</a:t>
             </a:r>
-            <a:pPr algn="l" indent="0" marL="0">
-              <a:buNone/>
-            </a:pPr>
             <a:r>
               <a:rPr lang="en-US" sz="1300" dirty="0">
                 <a:solidFill>
@@ -11094,9 +10968,6 @@
               </a:rPr>
               <a:t>I can recall </a:t>
             </a:r>
-            <a:pPr algn="l" indent="0" marL="0">
-              <a:buNone/>
-            </a:pPr>
             <a:r>
               <a:rPr lang="en-US" sz="1300" b="1" dirty="0">
                 <a:solidFill>
@@ -11108,9 +10979,6 @@
               </a:rPr>
               <a:t>vocabulary within a category</a:t>
             </a:r>
-            <a:pPr algn="l" indent="0" marL="0">
-              <a:buNone/>
-            </a:pPr>
             <a:r>
               <a:rPr lang="en-US" sz="1300" dirty="0">
                 <a:solidFill>
@@ -11594,9 +11462,6 @@
               </a:rPr>
               <a:t>A:</a:t>
             </a:r>
-            <a:pPr algn="l" indent="0" marL="0">
-              <a:buNone/>
-            </a:pPr>
             <a:r>
               <a:rPr lang="en-US" sz="1050" b="1" dirty="0">
                 <a:solidFill>
@@ -11642,9 +11507,6 @@
               </a:rPr>
               <a:t>B:</a:t>
             </a:r>
-            <a:pPr algn="l" indent="0" marL="0">
-              <a:buNone/>
-            </a:pPr>
             <a:r>
               <a:rPr lang="en-US" sz="1050" b="1" dirty="0">
                 <a:solidFill>
@@ -11690,9 +11552,6 @@
               </a:rPr>
               <a:t>A:</a:t>
             </a:r>
-            <a:pPr algn="l" indent="0" marL="0">
-              <a:buNone/>
-            </a:pPr>
             <a:r>
               <a:rPr lang="en-US" sz="1050" b="1" dirty="0">
                 <a:solidFill>
@@ -11738,9 +11597,6 @@
               </a:rPr>
               <a:t>B:</a:t>
             </a:r>
-            <a:pPr algn="l" indent="0" marL="0">
-              <a:buNone/>
-            </a:pPr>
             <a:r>
               <a:rPr lang="en-US" sz="1050" b="1" dirty="0">
                 <a:solidFill>
@@ -11915,9 +11771,6 @@
               </a:rPr>
               <a:t>A:</a:t>
             </a:r>
-            <a:pPr algn="l" indent="0" marL="0">
-              <a:buNone/>
-            </a:pPr>
             <a:r>
               <a:rPr lang="en-US" sz="1000" b="1" dirty="0">
                 <a:solidFill>
@@ -11963,9 +11816,6 @@
               </a:rPr>
               <a:t>B:</a:t>
             </a:r>
-            <a:pPr algn="l" indent="0" marL="0">
-              <a:buNone/>
-            </a:pPr>
             <a:r>
               <a:rPr lang="en-US" sz="1000" b="1" dirty="0">
                 <a:solidFill>
@@ -12011,9 +11861,6 @@
               </a:rPr>
               <a:t>A:</a:t>
             </a:r>
-            <a:pPr algn="l" indent="0" marL="0">
-              <a:buNone/>
-            </a:pPr>
             <a:r>
               <a:rPr lang="en-US" sz="1000" b="1" dirty="0">
                 <a:solidFill>
@@ -12059,9 +11906,6 @@
               </a:rPr>
               <a:t>B:</a:t>
             </a:r>
-            <a:pPr algn="l" indent="0" marL="0">
-              <a:buNone/>
-            </a:pPr>
             <a:r>
               <a:rPr lang="en-US" sz="1000" b="1" dirty="0">
                 <a:solidFill>
@@ -12107,9 +11951,6 @@
               </a:rPr>
               <a:t>A:</a:t>
             </a:r>
-            <a:pPr algn="l" indent="0" marL="0">
-              <a:buNone/>
-            </a:pPr>
             <a:r>
               <a:rPr lang="en-US" sz="1000" b="1" dirty="0">
                 <a:solidFill>
@@ -12155,9 +11996,6 @@
               </a:rPr>
               <a:t>B:</a:t>
             </a:r>
-            <a:pPr algn="l" indent="0" marL="0">
-              <a:buNone/>
-            </a:pPr>
             <a:r>
               <a:rPr lang="en-US" sz="1000" b="1" dirty="0">
                 <a:solidFill>
@@ -12618,9 +12456,6 @@
               </a:rPr>
               <a:t>早</a:t>
             </a:r>
-            <a:pPr algn="l" indent="0" marL="0">
-              <a:buNone/>
-            </a:pPr>
             <a:r>
               <a:rPr lang="en-US" sz="1200" dirty="0">
                 <a:solidFill>
@@ -12632,9 +12467,6 @@
               </a:rPr>
               <a:t> </a:t>
             </a:r>
-            <a:pPr algn="l" indent="0" marL="0">
-              <a:buNone/>
-            </a:pPr>
             <a:r>
               <a:rPr lang="en-US" sz="1200" dirty="0">
                 <a:solidFill>
@@ -12646,9 +12478,6 @@
               </a:rPr>
               <a:t>zǎo</a:t>
             </a:r>
-            <a:pPr algn="l" indent="0" marL="0">
-              <a:buNone/>
-            </a:pPr>
             <a:r>
               <a:rPr lang="en-US" sz="1200" dirty="0">
                 <a:solidFill>
@@ -12660,9 +12489,6 @@
               </a:rPr>
               <a:t> — early </a:t>
             </a:r>
-            <a:pPr algn="l" indent="0" marL="0">
-              <a:buNone/>
-            </a:pPr>
             <a:r>
               <a:rPr lang="en-US" sz="900" b="1" dirty="0">
                 <a:solidFill>
@@ -12691,9 +12517,6 @@
               </a:rPr>
               <a:t>晚</a:t>
             </a:r>
-            <a:pPr algn="l" indent="0" marL="0">
-              <a:buNone/>
-            </a:pPr>
             <a:r>
               <a:rPr lang="en-US" sz="1200" dirty="0">
                 <a:solidFill>
@@ -12705,9 +12528,6 @@
               </a:rPr>
               <a:t> </a:t>
             </a:r>
-            <a:pPr algn="l" indent="0" marL="0">
-              <a:buNone/>
-            </a:pPr>
             <a:r>
               <a:rPr lang="en-US" sz="1200" dirty="0">
                 <a:solidFill>
@@ -12719,9 +12539,6 @@
               </a:rPr>
               <a:t>wǎn</a:t>
             </a:r>
-            <a:pPr algn="l" indent="0" marL="0">
-              <a:buNone/>
-            </a:pPr>
             <a:r>
               <a:rPr lang="en-US" sz="1200" dirty="0">
                 <a:solidFill>
@@ -12733,9 +12550,6 @@
               </a:rPr>
               <a:t> — late; evening </a:t>
             </a:r>
-            <a:pPr algn="l" indent="0" marL="0">
-              <a:buNone/>
-            </a:pPr>
             <a:r>
               <a:rPr lang="en-US" sz="900" b="1" dirty="0">
                 <a:solidFill>
@@ -12764,9 +12578,6 @@
               </a:rPr>
               <a:t>早上</a:t>
             </a:r>
-            <a:pPr algn="l" indent="0" marL="0">
-              <a:buNone/>
-            </a:pPr>
             <a:r>
               <a:rPr lang="en-US" sz="1200" dirty="0">
                 <a:solidFill>
@@ -12778,9 +12589,6 @@
               </a:rPr>
               <a:t> </a:t>
             </a:r>
-            <a:pPr algn="l" indent="0" marL="0">
-              <a:buNone/>
-            </a:pPr>
             <a:r>
               <a:rPr lang="en-US" sz="1200" dirty="0">
                 <a:solidFill>
@@ -12792,9 +12600,6 @@
               </a:rPr>
               <a:t>zǎoshàng</a:t>
             </a:r>
-            <a:pPr algn="l" indent="0" marL="0">
-              <a:buNone/>
-            </a:pPr>
             <a:r>
               <a:rPr lang="en-US" sz="1200" dirty="0">
                 <a:solidFill>
@@ -12806,9 +12611,6 @@
               </a:rPr>
               <a:t> — early morning </a:t>
             </a:r>
-            <a:pPr algn="l" indent="0" marL="0">
-              <a:buNone/>
-            </a:pPr>
             <a:r>
               <a:rPr lang="en-US" sz="900" b="1" dirty="0">
                 <a:solidFill>
@@ -12837,9 +12639,6 @@
               </a:rPr>
               <a:t>晚上</a:t>
             </a:r>
-            <a:pPr algn="l" indent="0" marL="0">
-              <a:buNone/>
-            </a:pPr>
             <a:r>
               <a:rPr lang="en-US" sz="1200" dirty="0">
                 <a:solidFill>
@@ -12851,9 +12650,6 @@
               </a:rPr>
               <a:t> </a:t>
             </a:r>
-            <a:pPr algn="l" indent="0" marL="0">
-              <a:buNone/>
-            </a:pPr>
             <a:r>
               <a:rPr lang="en-US" sz="1200" dirty="0">
                 <a:solidFill>
@@ -12865,9 +12661,6 @@
               </a:rPr>
               <a:t>wǎnshàng</a:t>
             </a:r>
-            <a:pPr algn="l" indent="0" marL="0">
-              <a:buNone/>
-            </a:pPr>
             <a:r>
               <a:rPr lang="en-US" sz="1200" dirty="0">
                 <a:solidFill>
@@ -12879,9 +12672,6 @@
               </a:rPr>
               <a:t> — evening </a:t>
             </a:r>
-            <a:pPr algn="l" indent="0" marL="0">
-              <a:buNone/>
-            </a:pPr>
             <a:r>
               <a:rPr lang="en-US" sz="900" b="1" dirty="0">
                 <a:solidFill>
@@ -12910,9 +12700,6 @@
               </a:rPr>
               <a:t>上午</a:t>
             </a:r>
-            <a:pPr algn="l" indent="0" marL="0">
-              <a:buNone/>
-            </a:pPr>
             <a:r>
               <a:rPr lang="en-US" sz="1200" dirty="0">
                 <a:solidFill>
@@ -12924,9 +12711,6 @@
               </a:rPr>
               <a:t> </a:t>
             </a:r>
-            <a:pPr algn="l" indent="0" marL="0">
-              <a:buNone/>
-            </a:pPr>
             <a:r>
               <a:rPr lang="en-US" sz="1200" dirty="0">
                 <a:solidFill>
@@ -12938,9 +12722,6 @@
               </a:rPr>
               <a:t>shàngwǔ</a:t>
             </a:r>
-            <a:pPr algn="l" indent="0" marL="0">
-              <a:buNone/>
-            </a:pPr>
             <a:r>
               <a:rPr lang="en-US" sz="1200" dirty="0">
                 <a:solidFill>
@@ -12952,9 +12733,6 @@
               </a:rPr>
               <a:t> — morning (before noon) </a:t>
             </a:r>
-            <a:pPr algn="l" indent="0" marL="0">
-              <a:buNone/>
-            </a:pPr>
             <a:r>
               <a:rPr lang="en-US" sz="900" b="1" dirty="0">
                 <a:solidFill>
@@ -12983,9 +12761,6 @@
               </a:rPr>
               <a:t>中午</a:t>
             </a:r>
-            <a:pPr algn="l" indent="0" marL="0">
-              <a:buNone/>
-            </a:pPr>
             <a:r>
               <a:rPr lang="en-US" sz="1200" dirty="0">
                 <a:solidFill>
@@ -12997,9 +12772,6 @@
               </a:rPr>
               <a:t> </a:t>
             </a:r>
-            <a:pPr algn="l" indent="0" marL="0">
-              <a:buNone/>
-            </a:pPr>
             <a:r>
               <a:rPr lang="en-US" sz="1200" dirty="0">
                 <a:solidFill>
@@ -13011,9 +12783,6 @@
               </a:rPr>
               <a:t>zhōngwǔ</a:t>
             </a:r>
-            <a:pPr algn="l" indent="0" marL="0">
-              <a:buNone/>
-            </a:pPr>
             <a:r>
               <a:rPr lang="en-US" sz="1200" dirty="0">
                 <a:solidFill>
@@ -13025,9 +12794,6 @@
               </a:rPr>
               <a:t> — midday </a:t>
             </a:r>
-            <a:pPr algn="l" indent="0" marL="0">
-              <a:buNone/>
-            </a:pPr>
             <a:r>
               <a:rPr lang="en-US" sz="900" b="1" dirty="0">
                 <a:solidFill>
@@ -13056,9 +12822,6 @@
               </a:rPr>
               <a:t>下午</a:t>
             </a:r>
-            <a:pPr algn="l" indent="0" marL="0">
-              <a:buNone/>
-            </a:pPr>
             <a:r>
               <a:rPr lang="en-US" sz="1200" dirty="0">
                 <a:solidFill>
@@ -13070,9 +12833,6 @@
               </a:rPr>
               <a:t> </a:t>
             </a:r>
-            <a:pPr algn="l" indent="0" marL="0">
-              <a:buNone/>
-            </a:pPr>
             <a:r>
               <a:rPr lang="en-US" sz="1200" dirty="0">
                 <a:solidFill>
@@ -13084,9 +12844,6 @@
               </a:rPr>
               <a:t>xiàwǔ</a:t>
             </a:r>
-            <a:pPr algn="l" indent="0" marL="0">
-              <a:buNone/>
-            </a:pPr>
             <a:r>
               <a:rPr lang="en-US" sz="1200" dirty="0">
                 <a:solidFill>
@@ -13098,9 +12855,6 @@
               </a:rPr>
               <a:t> — afternoon </a:t>
             </a:r>
-            <a:pPr algn="l" indent="0" marL="0">
-              <a:buNone/>
-            </a:pPr>
             <a:r>
               <a:rPr lang="en-US" sz="900" b="1" dirty="0">
                 <a:solidFill>
@@ -13129,9 +12883,6 @@
               </a:rPr>
               <a:t>看书</a:t>
             </a:r>
-            <a:pPr algn="l" indent="0" marL="0">
-              <a:buNone/>
-            </a:pPr>
             <a:r>
               <a:rPr lang="en-US" sz="1200" dirty="0">
                 <a:solidFill>
@@ -13143,9 +12894,6 @@
               </a:rPr>
               <a:t> </a:t>
             </a:r>
-            <a:pPr algn="l" indent="0" marL="0">
-              <a:buNone/>
-            </a:pPr>
             <a:r>
               <a:rPr lang="en-US" sz="1200" dirty="0">
                 <a:solidFill>
@@ -13157,9 +12905,6 @@
               </a:rPr>
               <a:t>kànshū</a:t>
             </a:r>
-            <a:pPr algn="l" indent="0" marL="0">
-              <a:buNone/>
-            </a:pPr>
             <a:r>
               <a:rPr lang="en-US" sz="1200" dirty="0">
                 <a:solidFill>
@@ -13171,9 +12916,6 @@
               </a:rPr>
               <a:t> — read books </a:t>
             </a:r>
-            <a:pPr algn="l" indent="0" marL="0">
-              <a:buNone/>
-            </a:pPr>
             <a:r>
               <a:rPr lang="en-US" sz="900" b="1" dirty="0">
                 <a:solidFill>
@@ -13202,9 +12944,6 @@
               </a:rPr>
               <a:t>睡觉</a:t>
             </a:r>
-            <a:pPr algn="l" indent="0" marL="0">
-              <a:buNone/>
-            </a:pPr>
             <a:r>
               <a:rPr lang="en-US" sz="1200" dirty="0">
                 <a:solidFill>
@@ -13216,9 +12955,6 @@
               </a:rPr>
               <a:t> </a:t>
             </a:r>
-            <a:pPr algn="l" indent="0" marL="0">
-              <a:buNone/>
-            </a:pPr>
             <a:r>
               <a:rPr lang="en-US" sz="1200" dirty="0">
                 <a:solidFill>
@@ -13230,9 +12966,6 @@
               </a:rPr>
               <a:t>shuìjiào</a:t>
             </a:r>
-            <a:pPr algn="l" indent="0" marL="0">
-              <a:buNone/>
-            </a:pPr>
             <a:r>
               <a:rPr lang="en-US" sz="1200" dirty="0">
                 <a:solidFill>
@@ -13244,9 +12977,6 @@
               </a:rPr>
               <a:t> — sleep </a:t>
             </a:r>
-            <a:pPr algn="l" indent="0" marL="0">
-              <a:buNone/>
-            </a:pPr>
             <a:r>
               <a:rPr lang="en-US" sz="900" b="1" dirty="0">
                 <a:solidFill>
@@ -13275,9 +13005,6 @@
               </a:rPr>
               <a:t>游泳</a:t>
             </a:r>
-            <a:pPr algn="l" indent="0" marL="0">
-              <a:buNone/>
-            </a:pPr>
             <a:r>
               <a:rPr lang="en-US" sz="1200" dirty="0">
                 <a:solidFill>
@@ -13289,9 +13016,6 @@
               </a:rPr>
               <a:t> </a:t>
             </a:r>
-            <a:pPr algn="l" indent="0" marL="0">
-              <a:buNone/>
-            </a:pPr>
             <a:r>
               <a:rPr lang="en-US" sz="1200" dirty="0">
                 <a:solidFill>
@@ -13303,9 +13027,6 @@
               </a:rPr>
               <a:t>yóuyǒng</a:t>
             </a:r>
-            <a:pPr algn="l" indent="0" marL="0">
-              <a:buNone/>
-            </a:pPr>
             <a:r>
               <a:rPr lang="en-US" sz="1200" dirty="0">
                 <a:solidFill>
@@ -13317,9 +13038,6 @@
               </a:rPr>
               <a:t> — swim </a:t>
             </a:r>
-            <a:pPr algn="l" indent="0" marL="0">
-              <a:buNone/>
-            </a:pPr>
             <a:r>
               <a:rPr lang="en-US" sz="900" b="1" dirty="0">
                 <a:solidFill>
@@ -13348,9 +13066,6 @@
               </a:rPr>
               <a:t>打篮球</a:t>
             </a:r>
-            <a:pPr algn="l" indent="0" marL="0">
-              <a:buNone/>
-            </a:pPr>
             <a:r>
               <a:rPr lang="en-US" sz="1200" dirty="0">
                 <a:solidFill>
@@ -13362,9 +13077,6 @@
               </a:rPr>
               <a:t> </a:t>
             </a:r>
-            <a:pPr algn="l" indent="0" marL="0">
-              <a:buNone/>
-            </a:pPr>
             <a:r>
               <a:rPr lang="en-US" sz="1200" dirty="0">
                 <a:solidFill>
@@ -13376,9 +13088,6 @@
               </a:rPr>
               <a:t>dǎ lánqiú</a:t>
             </a:r>
-            <a:pPr algn="l" indent="0" marL="0">
-              <a:buNone/>
-            </a:pPr>
             <a:r>
               <a:rPr lang="en-US" sz="1200" dirty="0">
                 <a:solidFill>
@@ -13390,9 +13099,6 @@
               </a:rPr>
               <a:t> — play basketball </a:t>
             </a:r>
-            <a:pPr algn="l" indent="0" marL="0">
-              <a:buNone/>
-            </a:pPr>
             <a:r>
               <a:rPr lang="en-US" sz="900" b="1" dirty="0">
                 <a:solidFill>
@@ -13421,9 +13127,6 @@
               </a:rPr>
               <a:t>做作业</a:t>
             </a:r>
-            <a:pPr algn="l" indent="0" marL="0">
-              <a:buNone/>
-            </a:pPr>
             <a:r>
               <a:rPr lang="en-US" sz="1200" dirty="0">
                 <a:solidFill>
@@ -13435,9 +13138,6 @@
               </a:rPr>
               <a:t> </a:t>
             </a:r>
-            <a:pPr algn="l" indent="0" marL="0">
-              <a:buNone/>
-            </a:pPr>
             <a:r>
               <a:rPr lang="en-US" sz="1200" dirty="0">
                 <a:solidFill>
@@ -13449,9 +13149,6 @@
               </a:rPr>
               <a:t>zuò zuòyè</a:t>
             </a:r>
-            <a:pPr algn="l" indent="0" marL="0">
-              <a:buNone/>
-            </a:pPr>
             <a:r>
               <a:rPr lang="en-US" sz="1200" dirty="0">
                 <a:solidFill>
@@ -13463,9 +13160,6 @@
               </a:rPr>
               <a:t> — do homework </a:t>
             </a:r>
-            <a:pPr algn="l" indent="0" marL="0">
-              <a:buNone/>
-            </a:pPr>
             <a:r>
               <a:rPr lang="en-US" sz="900" b="1" dirty="0">
                 <a:solidFill>
@@ -14223,12 +13917,6 @@
               </a:rPr>
               <a:t>"Time first or last? In English, the time comes </a:t>
             </a:r>
-            <a:pPr algn="l" indent="0" marL="0">
-              <a:lnSpc>
-                <a:spcPts val="1750"/>
-              </a:lnSpc>
-              <a:buNone/>
-            </a:pPr>
             <a:r>
               <a:rPr lang="en-US" sz="1250" b="1" dirty="0">
                 <a:solidFill>
@@ -14240,12 +13928,6 @@
               </a:rPr>
               <a:t>after</a:t>
             </a:r>
-            <a:pPr algn="l" indent="0" marL="0">
-              <a:lnSpc>
-                <a:spcPts val="1750"/>
-              </a:lnSpc>
-              <a:buNone/>
-            </a:pPr>
             <a:r>
               <a:rPr lang="en-US" sz="1250" dirty="0">
                 <a:solidFill>
@@ -14257,12 +13939,6 @@
               </a:rPr>
               <a:t> the verb — 'I sleep </a:t>
             </a:r>
-            <a:pPr algn="l" indent="0" marL="0">
-              <a:lnSpc>
-                <a:spcPts val="1750"/>
-              </a:lnSpc>
-              <a:buNone/>
-            </a:pPr>
             <a:r>
               <a:rPr lang="en-US" sz="1250" b="1" dirty="0">
                 <a:solidFill>
@@ -14274,12 +13950,6 @@
               </a:rPr>
               <a:t>at 9:30pm</a:t>
             </a:r>
-            <a:pPr algn="l" indent="0" marL="0">
-              <a:lnSpc>
-                <a:spcPts val="1750"/>
-              </a:lnSpc>
-              <a:buNone/>
-            </a:pPr>
             <a:r>
               <a:rPr lang="en-US" sz="1250" dirty="0">
                 <a:solidFill>
@@ -14404,12 +14074,6 @@
               </a:rPr>
               <a:t>"In Chinese, time comes </a:t>
             </a:r>
-            <a:pPr algn="l" indent="0" marL="0">
-              <a:lnSpc>
-                <a:spcPts val="1750"/>
-              </a:lnSpc>
-              <a:buNone/>
-            </a:pPr>
             <a:r>
               <a:rPr lang="en-US" sz="1250" b="1" dirty="0">
                 <a:solidFill>
@@ -14421,12 +14085,6 @@
               </a:rPr>
               <a:t>before</a:t>
             </a:r>
-            <a:pPr algn="l" indent="0" marL="0">
-              <a:lnSpc>
-                <a:spcPts val="1750"/>
-              </a:lnSpc>
-              <a:buNone/>
-            </a:pPr>
             <a:r>
               <a:rPr lang="en-US" sz="1250" dirty="0">
                 <a:solidFill>
@@ -14551,12 +14209,6 @@
               </a:rPr>
               <a:t>"So: 我 (I) + </a:t>
             </a:r>
-            <a:pPr algn="l" indent="0" marL="0">
-              <a:lnSpc>
-                <a:spcPts val="1750"/>
-              </a:lnSpc>
-              <a:buNone/>
-            </a:pPr>
             <a:r>
               <a:rPr lang="en-US" sz="1250" b="1" dirty="0">
                 <a:solidFill>
@@ -14568,12 +14220,6 @@
               </a:rPr>
               <a:t>晚上</a:t>
             </a:r>
-            <a:pPr algn="l" indent="0" marL="0">
-              <a:lnSpc>
-                <a:spcPts val="1750"/>
-              </a:lnSpc>
-              <a:buNone/>
-            </a:pPr>
             <a:r>
               <a:rPr lang="en-US" sz="1250" dirty="0">
                 <a:solidFill>
@@ -14585,12 +14231,6 @@
               </a:rPr>
               <a:t> (evening) + </a:t>
             </a:r>
-            <a:pPr algn="l" indent="0" marL="0">
-              <a:lnSpc>
-                <a:spcPts val="1750"/>
-              </a:lnSpc>
-              <a:buNone/>
-            </a:pPr>
             <a:r>
               <a:rPr lang="en-US" sz="1250" b="1" dirty="0">
                 <a:solidFill>
@@ -14602,12 +14242,6 @@
               </a:rPr>
               <a:t>九点半</a:t>
             </a:r>
-            <a:pPr algn="l" indent="0" marL="0">
-              <a:lnSpc>
-                <a:spcPts val="1750"/>
-              </a:lnSpc>
-              <a:buNone/>
-            </a:pPr>
             <a:r>
               <a:rPr lang="en-US" sz="1250" dirty="0">
                 <a:solidFill>
@@ -14619,12 +14253,6 @@
               </a:rPr>
               <a:t> (9:30) + </a:t>
             </a:r>
-            <a:pPr algn="l" indent="0" marL="0">
-              <a:lnSpc>
-                <a:spcPts val="1750"/>
-              </a:lnSpc>
-              <a:buNone/>
-            </a:pPr>
             <a:r>
               <a:rPr lang="en-US" sz="1250" b="1" dirty="0">
                 <a:solidFill>
@@ -14636,12 +14264,6 @@
               </a:rPr>
               <a:t>睡觉</a:t>
             </a:r>
-            <a:pPr algn="l" indent="0" marL="0">
-              <a:lnSpc>
-                <a:spcPts val="1750"/>
-              </a:lnSpc>
-              <a:buNone/>
-            </a:pPr>
             <a:r>
               <a:rPr lang="en-US" sz="1250" dirty="0">
                 <a:solidFill>
@@ -14728,9 +14350,6 @@
               </a:rPr>
               <a:t>我 </a:t>
             </a:r>
-            <a:pPr algn="l" indent="0" marL="0">
-              <a:buNone/>
-            </a:pPr>
             <a:r>
               <a:rPr lang="en-US" sz="1500" b="1" dirty="0">
                 <a:solidFill>
@@ -14742,9 +14361,6 @@
               </a:rPr>
               <a:t>+</a:t>
             </a:r>
-            <a:pPr algn="l" indent="0" marL="0">
-              <a:buNone/>
-            </a:pPr>
             <a:r>
               <a:rPr lang="en-US" sz="1500" dirty="0">
                 <a:solidFill>
@@ -14756,9 +14372,6 @@
               </a:rPr>
               <a:t> 晚上 </a:t>
             </a:r>
-            <a:pPr algn="l" indent="0" marL="0">
-              <a:buNone/>
-            </a:pPr>
             <a:r>
               <a:rPr lang="en-US" sz="1500" b="1" dirty="0">
                 <a:solidFill>
@@ -14770,9 +14383,6 @@
               </a:rPr>
               <a:t>+</a:t>
             </a:r>
-            <a:pPr algn="l" indent="0" marL="0">
-              <a:buNone/>
-            </a:pPr>
             <a:r>
               <a:rPr lang="en-US" sz="1500" dirty="0">
                 <a:solidFill>
@@ -14784,9 +14394,6 @@
               </a:rPr>
               <a:t> 九点半 </a:t>
             </a:r>
-            <a:pPr algn="l" indent="0" marL="0">
-              <a:buNone/>
-            </a:pPr>
             <a:r>
               <a:rPr lang="en-US" sz="1500" b="1" dirty="0">
                 <a:solidFill>
@@ -14798,9 +14405,6 @@
               </a:rPr>
               <a:t>+</a:t>
             </a:r>
-            <a:pPr algn="l" indent="0" marL="0">
-              <a:buNone/>
-            </a:pPr>
             <a:r>
               <a:rPr lang="en-US" sz="1500" dirty="0">
                 <a:solidFill>
@@ -15284,9 +14888,6 @@
               </a:rPr>
               <a:t>Translate: </a:t>
             </a:r>
-            <a:pPr algn="l" indent="0" marL="0">
-              <a:buNone/>
-            </a:pPr>
             <a:r>
               <a:rPr lang="en-US" sz="1400" b="1" dirty="0">
                 <a:solidFill>
@@ -15479,9 +15080,6 @@
               </a:rPr>
               <a:t>What's wrong with </a:t>
             </a:r>
-            <a:pPr algn="l" indent="0" marL="0">
-              <a:buNone/>
-            </a:pPr>
             <a:r>
               <a:rPr lang="en-US" sz="1400" b="1" dirty="0">
                 <a:solidFill>
@@ -15493,9 +15091,6 @@
               </a:rPr>
               <a:t>我打篮球下午</a:t>
             </a:r>
-            <a:pPr algn="l" indent="0" marL="0">
-              <a:buNone/>
-            </a:pPr>
             <a:r>
               <a:rPr lang="en-US" sz="1400" dirty="0">
                 <a:solidFill>
@@ -15688,9 +15283,6 @@
               </a:rPr>
               <a:t>Translate: </a:t>
             </a:r>
-            <a:pPr algn="l" indent="0" marL="0">
-              <a:buNone/>
-            </a:pPr>
             <a:r>
               <a:rPr lang="en-US" sz="1400" b="1" dirty="0">
                 <a:solidFill>
@@ -16828,9 +16420,6 @@
               </a:rPr>
               <a:t>Complete your own dialogue using the sentence frames — fill in your </a:t>
             </a:r>
-            <a:pPr algn="l" indent="0" marL="0">
-              <a:buNone/>
-            </a:pPr>
             <a:r>
               <a:rPr lang="en-US" sz="1000" b="1" dirty="0">
                 <a:solidFill>
@@ -16842,9 +16431,6 @@
               </a:rPr>
               <a:t>real</a:t>
             </a:r>
-            <a:pPr algn="l" indent="0" marL="0">
-              <a:buNone/>
-            </a:pPr>
             <a:r>
               <a:rPr lang="en-US" sz="1000" dirty="0">
                 <a:solidFill>
@@ -16895,9 +16481,6 @@
               </a:rPr>
               <a:t>A:</a:t>
             </a:r>
-            <a:pPr algn="l" indent="0" marL="0">
-              <a:buNone/>
-            </a:pPr>
             <a:r>
               <a:rPr lang="en-US" sz="1100" dirty="0">
                 <a:solidFill>
@@ -16909,9 +16492,6 @@
               </a:rPr>
               <a:t>你早上几点</a:t>
             </a:r>
-            <a:pPr algn="l" indent="0" marL="0">
-              <a:buNone/>
-            </a:pPr>
             <a:r>
               <a:rPr lang="en-US" sz="1100" b="1" dirty="0">
                 <a:solidFill>
@@ -16923,9 +16503,6 @@
               </a:rPr>
               <a:t>起床</a:t>
             </a:r>
-            <a:pPr algn="l" indent="0" marL="0">
-              <a:buNone/>
-            </a:pPr>
             <a:r>
               <a:rPr lang="en-US" sz="1100" dirty="0">
                 <a:solidFill>
@@ -16954,9 +16531,6 @@
               </a:rPr>
               <a:t>B:</a:t>
             </a:r>
-            <a:pPr algn="l" indent="0" marL="0">
-              <a:buNone/>
-            </a:pPr>
             <a:r>
               <a:rPr lang="en-US" sz="1100" dirty="0">
                 <a:solidFill>
@@ -16968,9 +16542,6 @@
               </a:rPr>
               <a:t>我早上</a:t>
             </a:r>
-            <a:pPr algn="l" indent="0" marL="0">
-              <a:buNone/>
-            </a:pPr>
             <a:r>
               <a:rPr lang="en-US" sz="1100" b="1" dirty="0">
                 <a:solidFill>
@@ -16982,9 +16553,6 @@
               </a:rPr>
               <a:t>___</a:t>
             </a:r>
-            <a:pPr algn="l" indent="0" marL="0">
-              <a:buNone/>
-            </a:pPr>
             <a:r>
               <a:rPr lang="en-US" sz="1100" dirty="0">
                 <a:solidFill>
@@ -16996,9 +16564,6 @@
               </a:rPr>
               <a:t>起床，</a:t>
             </a:r>
-            <a:pPr algn="l" indent="0" marL="0">
-              <a:buNone/>
-            </a:pPr>
             <a:r>
               <a:rPr lang="en-US" sz="1100" b="1" dirty="0">
                 <a:solidFill>
@@ -17010,9 +16575,6 @@
               </a:rPr>
               <a:t>___</a:t>
             </a:r>
-            <a:pPr algn="l" indent="0" marL="0">
-              <a:buNone/>
-            </a:pPr>
             <a:r>
               <a:rPr lang="en-US" sz="1100" dirty="0">
                 <a:solidFill>
@@ -17041,9 +16603,6 @@
               </a:rPr>
               <a:t>A:</a:t>
             </a:r>
-            <a:pPr algn="l" indent="0" marL="0">
-              <a:buNone/>
-            </a:pPr>
             <a:r>
               <a:rPr lang="en-US" sz="1100" dirty="0">
                 <a:solidFill>
@@ -17055,9 +16614,6 @@
               </a:rPr>
               <a:t>你们下午几点</a:t>
             </a:r>
-            <a:pPr algn="l" indent="0" marL="0">
-              <a:buNone/>
-            </a:pPr>
             <a:r>
               <a:rPr lang="en-US" sz="1100" b="1" dirty="0">
                 <a:solidFill>
@@ -17069,9 +16625,6 @@
               </a:rPr>
               <a:t>放学</a:t>
             </a:r>
-            <a:pPr algn="l" indent="0" marL="0">
-              <a:buNone/>
-            </a:pPr>
             <a:r>
               <a:rPr lang="en-US" sz="1100" dirty="0">
                 <a:solidFill>
@@ -17100,9 +16653,6 @@
               </a:rPr>
               <a:t>B:</a:t>
             </a:r>
-            <a:pPr algn="l" indent="0" marL="0">
-              <a:buNone/>
-            </a:pPr>
             <a:r>
               <a:rPr lang="en-US" sz="1100" dirty="0">
                 <a:solidFill>
@@ -17114,9 +16664,6 @@
               </a:rPr>
               <a:t>我们下午</a:t>
             </a:r>
-            <a:pPr algn="l" indent="0" marL="0">
-              <a:buNone/>
-            </a:pPr>
             <a:r>
               <a:rPr lang="en-US" sz="1100" b="1" dirty="0">
                 <a:solidFill>
@@ -17128,9 +16675,6 @@
               </a:rPr>
               <a:t>___</a:t>
             </a:r>
-            <a:pPr algn="l" indent="0" marL="0">
-              <a:buNone/>
-            </a:pPr>
             <a:r>
               <a:rPr lang="en-US" sz="1100" dirty="0">
                 <a:solidFill>
@@ -17142,9 +16686,6 @@
               </a:rPr>
               <a:t>放学。放学以后，我</a:t>
             </a:r>
-            <a:pPr algn="l" indent="0" marL="0">
-              <a:buNone/>
-            </a:pPr>
             <a:r>
               <a:rPr lang="en-US" sz="1100" b="1" dirty="0">
                 <a:solidFill>
@@ -17156,9 +16697,6 @@
               </a:rPr>
               <a:t>___</a:t>
             </a:r>
-            <a:pPr algn="l" indent="0" marL="0">
-              <a:buNone/>
-            </a:pPr>
             <a:r>
               <a:rPr lang="en-US" sz="1100" dirty="0">
                 <a:solidFill>
@@ -17187,9 +16725,6 @@
               </a:rPr>
               <a:t>A:</a:t>
             </a:r>
-            <a:pPr algn="l" indent="0" marL="0">
-              <a:buNone/>
-            </a:pPr>
             <a:r>
               <a:rPr lang="en-US" sz="1100" dirty="0">
                 <a:solidFill>
@@ -17201,9 +16736,6 @@
               </a:rPr>
               <a:t>你晚上几点</a:t>
             </a:r>
-            <a:pPr algn="l" indent="0" marL="0">
-              <a:buNone/>
-            </a:pPr>
             <a:r>
               <a:rPr lang="en-US" sz="1100" b="1" dirty="0">
                 <a:solidFill>
@@ -17215,9 +16747,6 @@
               </a:rPr>
               <a:t>睡觉</a:t>
             </a:r>
-            <a:pPr algn="l" indent="0" marL="0">
-              <a:buNone/>
-            </a:pPr>
             <a:r>
               <a:rPr lang="en-US" sz="1100" dirty="0">
                 <a:solidFill>
@@ -17246,9 +16775,6 @@
               </a:rPr>
               <a:t>B:</a:t>
             </a:r>
-            <a:pPr algn="l" indent="0" marL="0">
-              <a:buNone/>
-            </a:pPr>
             <a:r>
               <a:rPr lang="en-US" sz="1100" dirty="0">
                 <a:solidFill>
@@ -17260,9 +16786,6 @@
               </a:rPr>
               <a:t>我晚上</a:t>
             </a:r>
-            <a:pPr algn="l" indent="0" marL="0">
-              <a:buNone/>
-            </a:pPr>
             <a:r>
               <a:rPr lang="en-US" sz="1100" b="1" dirty="0">
                 <a:solidFill>
@@ -17274,9 +16797,6 @@
               </a:rPr>
               <a:t>___</a:t>
             </a:r>
-            <a:pPr algn="l" indent="0" marL="0">
-              <a:buNone/>
-            </a:pPr>
             <a:r>
               <a:rPr lang="en-US" sz="1100" dirty="0">
                 <a:solidFill>
